--- a/Update_Slides/FYP_Weekly_Update_Slides_5March_normalized_stacked.pptx
+++ b/Update_Slides/FYP_Weekly_Update_Slides_5March_normalized_stacked.pptx
@@ -5592,12 +5592,81 @@
           <a:chExt cx="0" cy="0"/>
         </a:xfrm>
       </p:grpSpPr>
+      <p:sp>
+        <p:nvSpPr>
+          <p:cNvPr id="2" name="Title 1">
+            <a:extLst>
+              <a:ext uri="{FF2B5EF4-FFF2-40B4-BE49-F238E27FC236}">
+                <a16:creationId xmlns:a16="http://schemas.microsoft.com/office/drawing/2014/main" id="{81836B37-DF93-2900-1C2D-80BF8A2F68D6}"/>
+              </a:ext>
+            </a:extLst>
+          </p:cNvPr>
+          <p:cNvSpPr>
+            <a:spLocks noGrp="1"/>
+          </p:cNvSpPr>
+          <p:nvPr>
+            <p:ph type="title"/>
+          </p:nvPr>
+        </p:nvSpPr>
+        <p:spPr/>
+        <p:txBody>
+          <a:bodyPr/>
+          <a:lstStyle/>
+          <a:p>
+            <a:r>
+              <a:rPr lang="en-US" b="1" dirty="0"/>
+              <a:t>Initial selection: </a:t>
+            </a:r>
+            <a:r>
+              <a:rPr lang="en-US" dirty="0"/>
+              <a:t>neutral pion mass distribution</a:t>
+            </a:r>
+            <a:endParaRPr lang="en-SG" dirty="0"/>
+          </a:p>
+        </p:txBody>
+      </p:sp>
+      <p:sp>
+        <p:nvSpPr>
+          <p:cNvPr id="4" name="TextBox 3">
+            <a:extLst>
+              <a:ext uri="{FF2B5EF4-FFF2-40B4-BE49-F238E27FC236}">
+                <a16:creationId xmlns:a16="http://schemas.microsoft.com/office/drawing/2014/main" id="{7B727EAE-A771-3C99-0087-8E9B17E5C5E0}"/>
+              </a:ext>
+            </a:extLst>
+          </p:cNvPr>
+          <p:cNvSpPr txBox="1"/>
+          <p:nvPr/>
+        </p:nvSpPr>
+        <p:spPr>
+          <a:xfrm>
+            <a:off x="1097279" y="1815053"/>
+            <a:ext cx="10902161" cy="646331"/>
+          </a:xfrm>
+          <a:prstGeom prst="rect">
+            <a:avLst/>
+          </a:prstGeom>
+          <a:noFill/>
+        </p:spPr>
+        <p:txBody>
+          <a:bodyPr wrap="square">
+            <a:spAutoFit/>
+          </a:bodyPr>
+          <a:lstStyle/>
+          <a:p>
+            <a:r>
+              <a:rPr lang="en-US" dirty="0"/>
+              <a:t>A plot of the reconstructed neutral pion mass distribution for reconstructed interactions split into their true interaction categories is shown</a:t>
+            </a:r>
+            <a:endParaRPr lang="en-SG" b="1" dirty="0"/>
+          </a:p>
+        </p:txBody>
+      </p:sp>
       <p:pic>
         <p:nvPicPr>
-          <p:cNvPr id="8" name="Picture 7">
-            <a:extLst>
-              <a:ext uri="{FF2B5EF4-FFF2-40B4-BE49-F238E27FC236}">
-                <a16:creationId xmlns:a16="http://schemas.microsoft.com/office/drawing/2014/main" id="{67E0DC48-EB78-036A-751E-5007EDE9A5F9}"/>
+          <p:cNvPr id="9" name="Picture 8">
+            <a:extLst>
+              <a:ext uri="{FF2B5EF4-FFF2-40B4-BE49-F238E27FC236}">
+                <a16:creationId xmlns:a16="http://schemas.microsoft.com/office/drawing/2014/main" id="{F07D6F23-3348-4D5F-FFC3-A19189E9B699}"/>
               </a:ext>
             </a:extLst>
           </p:cNvPr>
@@ -5614,8 +5683,8 @@
         </p:blipFill>
         <p:spPr>
           <a:xfrm>
-            <a:off x="6510208" y="2615541"/>
-            <a:ext cx="5391439" cy="3270806"/>
+            <a:off x="33339" y="2728459"/>
+            <a:ext cx="5929312" cy="3100387"/>
           </a:xfrm>
           <a:prstGeom prst="rect">
             <a:avLst/>
@@ -5624,43 +5693,10 @@
       </p:pic>
       <p:sp>
         <p:nvSpPr>
-          <p:cNvPr id="2" name="Title 1">
-            <a:extLst>
-              <a:ext uri="{FF2B5EF4-FFF2-40B4-BE49-F238E27FC236}">
-                <a16:creationId xmlns:a16="http://schemas.microsoft.com/office/drawing/2014/main" id="{81836B37-DF93-2900-1C2D-80BF8A2F68D6}"/>
-              </a:ext>
-            </a:extLst>
-          </p:cNvPr>
-          <p:cNvSpPr>
-            <a:spLocks noGrp="1"/>
-          </p:cNvSpPr>
-          <p:nvPr>
-            <p:ph type="title"/>
-          </p:nvPr>
-        </p:nvSpPr>
-        <p:spPr/>
-        <p:txBody>
-          <a:bodyPr/>
-          <a:lstStyle/>
-          <a:p>
-            <a:r>
-              <a:rPr lang="en-US" b="1" dirty="0"/>
-              <a:t>Initial selection: </a:t>
-            </a:r>
-            <a:r>
-              <a:rPr lang="en-US" dirty="0"/>
-              <a:t>neutral pion mass distribution</a:t>
-            </a:r>
-            <a:endParaRPr lang="en-SG" dirty="0"/>
-          </a:p>
-        </p:txBody>
-      </p:sp>
-      <p:sp>
-        <p:nvSpPr>
-          <p:cNvPr id="4" name="TextBox 3">
-            <a:extLst>
-              <a:ext uri="{FF2B5EF4-FFF2-40B4-BE49-F238E27FC236}">
-                <a16:creationId xmlns:a16="http://schemas.microsoft.com/office/drawing/2014/main" id="{7B727EAE-A771-3C99-0087-8E9B17E5C5E0}"/>
+          <p:cNvPr id="10" name="TextBox 9">
+            <a:extLst>
+              <a:ext uri="{FF2B5EF4-FFF2-40B4-BE49-F238E27FC236}">
+                <a16:creationId xmlns:a16="http://schemas.microsoft.com/office/drawing/2014/main" id="{973505F4-87D5-9F87-22BA-23F4BCFEA3BE}"/>
               </a:ext>
             </a:extLst>
           </p:cNvPr>
@@ -5669,8 +5705,8 @@
         </p:nvSpPr>
         <p:spPr>
           <a:xfrm>
-            <a:off x="1097279" y="1815053"/>
-            <a:ext cx="10902161" cy="646331"/>
+            <a:off x="168670" y="5763424"/>
+            <a:ext cx="5927329" cy="307777"/>
           </a:xfrm>
           <a:prstGeom prst="rect">
             <a:avLst/>
@@ -5684,19 +5720,63 @@
           <a:lstStyle/>
           <a:p>
             <a:r>
-              <a:rPr lang="en-US" dirty="0"/>
-              <a:t>A plot of the reconstructed neutral pion mass distribution for reconstructed interactions split into their true interaction categories is shown</a:t>
-            </a:r>
-            <a:endParaRPr lang="en-SG" b="1" dirty="0"/>
+              <a:rPr lang="en-US" sz="1400" b="1" dirty="0"/>
+              <a:t>Reconstructed neutral pion mass plot from lane’s paper, </a:t>
+            </a:r>
+            <a:r>
+              <a:rPr lang="en-US" sz="1400" b="1" dirty="0" err="1"/>
+              <a:t>normalised</a:t>
+            </a:r>
+            <a:r>
+              <a:rPr lang="en-US" sz="1400" b="1" dirty="0"/>
+              <a:t> to unity</a:t>
+            </a:r>
+            <a:endParaRPr lang="en-SG" sz="1400" b="1" dirty="0"/>
+          </a:p>
+        </p:txBody>
+      </p:sp>
+      <p:sp>
+        <p:nvSpPr>
+          <p:cNvPr id="11" name="TextBox 10">
+            <a:extLst>
+              <a:ext uri="{FF2B5EF4-FFF2-40B4-BE49-F238E27FC236}">
+                <a16:creationId xmlns:a16="http://schemas.microsoft.com/office/drawing/2014/main" id="{D86ECC95-6159-0502-7A59-4AAFAD06552D}"/>
+              </a:ext>
+            </a:extLst>
+          </p:cNvPr>
+          <p:cNvSpPr txBox="1"/>
+          <p:nvPr/>
+        </p:nvSpPr>
+        <p:spPr>
+          <a:xfrm>
+            <a:off x="6918508" y="5766519"/>
+            <a:ext cx="4574841" cy="307777"/>
+          </a:xfrm>
+          <a:prstGeom prst="rect">
+            <a:avLst/>
+          </a:prstGeom>
+          <a:noFill/>
+        </p:spPr>
+        <p:txBody>
+          <a:bodyPr wrap="square">
+            <a:spAutoFit/>
+          </a:bodyPr>
+          <a:lstStyle/>
+          <a:p>
+            <a:r>
+              <a:rPr lang="en-US" sz="1400" b="1" dirty="0"/>
+              <a:t>Reconstructed neutral pion mass plot from my BNB sample</a:t>
+            </a:r>
+            <a:endParaRPr lang="en-SG" sz="1400" b="1" dirty="0"/>
           </a:p>
         </p:txBody>
       </p:sp>
       <p:pic>
         <p:nvPicPr>
-          <p:cNvPr id="9" name="Picture 8">
-            <a:extLst>
-              <a:ext uri="{FF2B5EF4-FFF2-40B4-BE49-F238E27FC236}">
-                <a16:creationId xmlns:a16="http://schemas.microsoft.com/office/drawing/2014/main" id="{F07D6F23-3348-4D5F-FFC3-A19189E9B699}"/>
+          <p:cNvPr id="18" name="Picture 17">
+            <a:extLst>
+              <a:ext uri="{FF2B5EF4-FFF2-40B4-BE49-F238E27FC236}">
+                <a16:creationId xmlns:a16="http://schemas.microsoft.com/office/drawing/2014/main" id="{30EDD191-4065-EB9C-CB0A-F105F846E353}"/>
               </a:ext>
             </a:extLst>
           </p:cNvPr>
@@ -5713,94 +5793,14 @@
         </p:blipFill>
         <p:spPr>
           <a:xfrm>
-            <a:off x="33339" y="2728459"/>
-            <a:ext cx="5929312" cy="3100387"/>
+            <a:off x="6500087" y="2545760"/>
+            <a:ext cx="5411681" cy="3283086"/>
           </a:xfrm>
           <a:prstGeom prst="rect">
             <a:avLst/>
           </a:prstGeom>
         </p:spPr>
       </p:pic>
-      <p:sp>
-        <p:nvSpPr>
-          <p:cNvPr id="10" name="TextBox 9">
-            <a:extLst>
-              <a:ext uri="{FF2B5EF4-FFF2-40B4-BE49-F238E27FC236}">
-                <a16:creationId xmlns:a16="http://schemas.microsoft.com/office/drawing/2014/main" id="{973505F4-87D5-9F87-22BA-23F4BCFEA3BE}"/>
-              </a:ext>
-            </a:extLst>
-          </p:cNvPr>
-          <p:cNvSpPr txBox="1"/>
-          <p:nvPr/>
-        </p:nvSpPr>
-        <p:spPr>
-          <a:xfrm>
-            <a:off x="168670" y="5763424"/>
-            <a:ext cx="5927329" cy="307777"/>
-          </a:xfrm>
-          <a:prstGeom prst="rect">
-            <a:avLst/>
-          </a:prstGeom>
-          <a:noFill/>
-        </p:spPr>
-        <p:txBody>
-          <a:bodyPr wrap="square">
-            <a:spAutoFit/>
-          </a:bodyPr>
-          <a:lstStyle/>
-          <a:p>
-            <a:r>
-              <a:rPr lang="en-US" sz="1400" b="1" dirty="0"/>
-              <a:t>Reconstructed neutral pion mass plot from lane’s paper, </a:t>
-            </a:r>
-            <a:r>
-              <a:rPr lang="en-US" sz="1400" b="1" dirty="0" err="1"/>
-              <a:t>normalised</a:t>
-            </a:r>
-            <a:r>
-              <a:rPr lang="en-US" sz="1400" b="1" dirty="0"/>
-              <a:t> to unity</a:t>
-            </a:r>
-            <a:endParaRPr lang="en-SG" sz="1400" b="1" dirty="0"/>
-          </a:p>
-        </p:txBody>
-      </p:sp>
-      <p:sp>
-        <p:nvSpPr>
-          <p:cNvPr id="11" name="TextBox 10">
-            <a:extLst>
-              <a:ext uri="{FF2B5EF4-FFF2-40B4-BE49-F238E27FC236}">
-                <a16:creationId xmlns:a16="http://schemas.microsoft.com/office/drawing/2014/main" id="{D86ECC95-6159-0502-7A59-4AAFAD06552D}"/>
-              </a:ext>
-            </a:extLst>
-          </p:cNvPr>
-          <p:cNvSpPr txBox="1"/>
-          <p:nvPr/>
-        </p:nvSpPr>
-        <p:spPr>
-          <a:xfrm>
-            <a:off x="6918508" y="5766519"/>
-            <a:ext cx="4574841" cy="307777"/>
-          </a:xfrm>
-          <a:prstGeom prst="rect">
-            <a:avLst/>
-          </a:prstGeom>
-          <a:noFill/>
-        </p:spPr>
-        <p:txBody>
-          <a:bodyPr wrap="square">
-            <a:spAutoFit/>
-          </a:bodyPr>
-          <a:lstStyle/>
-          <a:p>
-            <a:r>
-              <a:rPr lang="en-US" sz="1400" b="1" dirty="0"/>
-              <a:t>Reconstructed neutral pion mass plot from my BNB sample</a:t>
-            </a:r>
-            <a:endParaRPr lang="en-SG" sz="1400" b="1" dirty="0"/>
-          </a:p>
-        </p:txBody>
-      </p:sp>
     </p:spTree>
     <p:extLst>
       <p:ext uri="{BB962C8B-B14F-4D97-AF65-F5344CB8AC3E}">
